--- a/template-pptx.pptx
+++ b/template-pptx.pptx
@@ -5823,7 +5823,7 @@
       </p:sp>
       <p:graphicFrame xmlns:a="http://schemas.openxmlformats.org/drawingml/2006/main" xmlns:r="http://schemas.openxmlformats.org/officeDocument/2006/relationships" xmlns:p="http://schemas.openxmlformats.org/presentationml/2006/main">
         <p:nvGraphicFramePr>
-          <p:cNvPr id="762272195" name=""/>
+          <p:cNvPr id="984877939" name=""/>
           <p:cNvGraphicFramePr>
             <a:graphicFrameLocks noGrp="true"/>
           </p:cNvGraphicFramePr>

--- a/template-pptx.pptx
+++ b/template-pptx.pptx
@@ -5823,7 +5823,7 @@
       </p:sp>
       <p:graphicFrame xmlns:a="http://schemas.openxmlformats.org/drawingml/2006/main" xmlns:r="http://schemas.openxmlformats.org/officeDocument/2006/relationships" xmlns:p="http://schemas.openxmlformats.org/presentationml/2006/main">
         <p:nvGraphicFramePr>
-          <p:cNvPr id="984877939" name=""/>
+          <p:cNvPr id="154186561" name=""/>
           <p:cNvGraphicFramePr>
             <a:graphicFrameLocks noGrp="true"/>
           </p:cNvGraphicFramePr>

--- a/template-pptx.pptx
+++ b/template-pptx.pptx
@@ -5823,7 +5823,7 @@
       </p:sp>
       <p:graphicFrame xmlns:a="http://schemas.openxmlformats.org/drawingml/2006/main" xmlns:r="http://schemas.openxmlformats.org/officeDocument/2006/relationships" xmlns:p="http://schemas.openxmlformats.org/presentationml/2006/main">
         <p:nvGraphicFramePr>
-          <p:cNvPr id="154186561" name=""/>
+          <p:cNvPr id="834686133" name=""/>
           <p:cNvGraphicFramePr>
             <a:graphicFrameLocks noGrp="true"/>
           </p:cNvGraphicFramePr>

--- a/template-pptx.pptx
+++ b/template-pptx.pptx
@@ -5823,7 +5823,7 @@
       </p:sp>
       <p:graphicFrame xmlns:a="http://schemas.openxmlformats.org/drawingml/2006/main" xmlns:r="http://schemas.openxmlformats.org/officeDocument/2006/relationships" xmlns:p="http://schemas.openxmlformats.org/presentationml/2006/main">
         <p:nvGraphicFramePr>
-          <p:cNvPr id="834686133" name=""/>
+          <p:cNvPr id="825902076" name=""/>
           <p:cNvGraphicFramePr>
             <a:graphicFrameLocks noGrp="true"/>
           </p:cNvGraphicFramePr>

--- a/template-pptx.pptx
+++ b/template-pptx.pptx
@@ -5823,7 +5823,7 @@
       </p:sp>
       <p:graphicFrame xmlns:a="http://schemas.openxmlformats.org/drawingml/2006/main" xmlns:r="http://schemas.openxmlformats.org/officeDocument/2006/relationships" xmlns:p="http://schemas.openxmlformats.org/presentationml/2006/main">
         <p:nvGraphicFramePr>
-          <p:cNvPr id="825902076" name=""/>
+          <p:cNvPr id="667364898" name=""/>
           <p:cNvGraphicFramePr>
             <a:graphicFrameLocks noGrp="true"/>
           </p:cNvGraphicFramePr>

--- a/template-pptx.pptx
+++ b/template-pptx.pptx
@@ -5823,7 +5823,7 @@
       </p:sp>
       <p:graphicFrame xmlns:a="http://schemas.openxmlformats.org/drawingml/2006/main" xmlns:r="http://schemas.openxmlformats.org/officeDocument/2006/relationships" xmlns:p="http://schemas.openxmlformats.org/presentationml/2006/main">
         <p:nvGraphicFramePr>
-          <p:cNvPr id="667364898" name=""/>
+          <p:cNvPr id="615130924" name=""/>
           <p:cNvGraphicFramePr>
             <a:graphicFrameLocks noGrp="true"/>
           </p:cNvGraphicFramePr>

--- a/template-pptx.pptx
+++ b/template-pptx.pptx
@@ -5823,7 +5823,7 @@
       </p:sp>
       <p:graphicFrame xmlns:a="http://schemas.openxmlformats.org/drawingml/2006/main" xmlns:r="http://schemas.openxmlformats.org/officeDocument/2006/relationships" xmlns:p="http://schemas.openxmlformats.org/presentationml/2006/main">
         <p:nvGraphicFramePr>
-          <p:cNvPr id="615130924" name=""/>
+          <p:cNvPr id="810745421" name=""/>
           <p:cNvGraphicFramePr>
             <a:graphicFrameLocks noGrp="true"/>
           </p:cNvGraphicFramePr>

--- a/template-pptx.pptx
+++ b/template-pptx.pptx
@@ -5823,7 +5823,7 @@
       </p:sp>
       <p:graphicFrame xmlns:a="http://schemas.openxmlformats.org/drawingml/2006/main" xmlns:r="http://schemas.openxmlformats.org/officeDocument/2006/relationships" xmlns:p="http://schemas.openxmlformats.org/presentationml/2006/main">
         <p:nvGraphicFramePr>
-          <p:cNvPr id="810745421" name=""/>
+          <p:cNvPr id="537021627" name=""/>
           <p:cNvGraphicFramePr>
             <a:graphicFrameLocks noGrp="true"/>
           </p:cNvGraphicFramePr>

--- a/template-pptx.pptx
+++ b/template-pptx.pptx
@@ -5823,7 +5823,7 @@
       </p:sp>
       <p:graphicFrame xmlns:a="http://schemas.openxmlformats.org/drawingml/2006/main" xmlns:r="http://schemas.openxmlformats.org/officeDocument/2006/relationships" xmlns:p="http://schemas.openxmlformats.org/presentationml/2006/main">
         <p:nvGraphicFramePr>
-          <p:cNvPr id="537021627" name=""/>
+          <p:cNvPr id="31014269" name=""/>
           <p:cNvGraphicFramePr>
             <a:graphicFrameLocks noGrp="true"/>
           </p:cNvGraphicFramePr>

--- a/template-pptx.pptx
+++ b/template-pptx.pptx
@@ -5823,7 +5823,7 @@
       </p:sp>
       <p:graphicFrame xmlns:a="http://schemas.openxmlformats.org/drawingml/2006/main" xmlns:r="http://schemas.openxmlformats.org/officeDocument/2006/relationships" xmlns:p="http://schemas.openxmlformats.org/presentationml/2006/main">
         <p:nvGraphicFramePr>
-          <p:cNvPr id="31014269" name=""/>
+          <p:cNvPr id="249362519" name=""/>
           <p:cNvGraphicFramePr>
             <a:graphicFrameLocks noGrp="true"/>
           </p:cNvGraphicFramePr>

--- a/template-pptx.pptx
+++ b/template-pptx.pptx
@@ -5823,7 +5823,7 @@
       </p:sp>
       <p:graphicFrame xmlns:a="http://schemas.openxmlformats.org/drawingml/2006/main" xmlns:r="http://schemas.openxmlformats.org/officeDocument/2006/relationships" xmlns:p="http://schemas.openxmlformats.org/presentationml/2006/main">
         <p:nvGraphicFramePr>
-          <p:cNvPr id="249362519" name=""/>
+          <p:cNvPr id="307144118" name=""/>
           <p:cNvGraphicFramePr>
             <a:graphicFrameLocks noGrp="true"/>
           </p:cNvGraphicFramePr>

--- a/template-pptx.pptx
+++ b/template-pptx.pptx
@@ -5823,7 +5823,7 @@
       </p:sp>
       <p:graphicFrame xmlns:a="http://schemas.openxmlformats.org/drawingml/2006/main" xmlns:r="http://schemas.openxmlformats.org/officeDocument/2006/relationships" xmlns:p="http://schemas.openxmlformats.org/presentationml/2006/main">
         <p:nvGraphicFramePr>
-          <p:cNvPr id="307144118" name=""/>
+          <p:cNvPr id="123678053" name=""/>
           <p:cNvGraphicFramePr>
             <a:graphicFrameLocks noGrp="true"/>
           </p:cNvGraphicFramePr>

--- a/template-pptx.pptx
+++ b/template-pptx.pptx
@@ -5823,7 +5823,7 @@
       </p:sp>
       <p:graphicFrame xmlns:a="http://schemas.openxmlformats.org/drawingml/2006/main" xmlns:r="http://schemas.openxmlformats.org/officeDocument/2006/relationships" xmlns:p="http://schemas.openxmlformats.org/presentationml/2006/main">
         <p:nvGraphicFramePr>
-          <p:cNvPr id="123678053" name=""/>
+          <p:cNvPr id="11622236" name=""/>
           <p:cNvGraphicFramePr>
             <a:graphicFrameLocks noGrp="true"/>
           </p:cNvGraphicFramePr>

--- a/template-pptx.pptx
+++ b/template-pptx.pptx
@@ -5823,7 +5823,7 @@
       </p:sp>
       <p:graphicFrame xmlns:a="http://schemas.openxmlformats.org/drawingml/2006/main" xmlns:r="http://schemas.openxmlformats.org/officeDocument/2006/relationships" xmlns:p="http://schemas.openxmlformats.org/presentationml/2006/main">
         <p:nvGraphicFramePr>
-          <p:cNvPr id="11622236" name=""/>
+          <p:cNvPr id="155722101" name=""/>
           <p:cNvGraphicFramePr>
             <a:graphicFrameLocks noGrp="true"/>
           </p:cNvGraphicFramePr>

--- a/template-pptx.pptx
+++ b/template-pptx.pptx
@@ -5823,7 +5823,7 @@
       </p:sp>
       <p:graphicFrame xmlns:a="http://schemas.openxmlformats.org/drawingml/2006/main" xmlns:r="http://schemas.openxmlformats.org/officeDocument/2006/relationships" xmlns:p="http://schemas.openxmlformats.org/presentationml/2006/main">
         <p:nvGraphicFramePr>
-          <p:cNvPr id="155722101" name=""/>
+          <p:cNvPr id="478031704" name=""/>
           <p:cNvGraphicFramePr>
             <a:graphicFrameLocks noGrp="true"/>
           </p:cNvGraphicFramePr>

--- a/template-pptx.pptx
+++ b/template-pptx.pptx
@@ -5823,7 +5823,7 @@
       </p:sp>
       <p:graphicFrame xmlns:a="http://schemas.openxmlformats.org/drawingml/2006/main" xmlns:r="http://schemas.openxmlformats.org/officeDocument/2006/relationships" xmlns:p="http://schemas.openxmlformats.org/presentationml/2006/main">
         <p:nvGraphicFramePr>
-          <p:cNvPr id="478031704" name=""/>
+          <p:cNvPr id="81208274" name=""/>
           <p:cNvGraphicFramePr>
             <a:graphicFrameLocks noGrp="true"/>
           </p:cNvGraphicFramePr>

--- a/template-pptx.pptx
+++ b/template-pptx.pptx
@@ -5823,7 +5823,7 @@
       </p:sp>
       <p:graphicFrame xmlns:a="http://schemas.openxmlformats.org/drawingml/2006/main" xmlns:r="http://schemas.openxmlformats.org/officeDocument/2006/relationships" xmlns:p="http://schemas.openxmlformats.org/presentationml/2006/main">
         <p:nvGraphicFramePr>
-          <p:cNvPr id="81208274" name=""/>
+          <p:cNvPr id="183025567" name=""/>
           <p:cNvGraphicFramePr>
             <a:graphicFrameLocks noGrp="true"/>
           </p:cNvGraphicFramePr>

--- a/template-pptx.pptx
+++ b/template-pptx.pptx
@@ -5823,7 +5823,7 @@
       </p:sp>
       <p:graphicFrame xmlns:a="http://schemas.openxmlformats.org/drawingml/2006/main" xmlns:r="http://schemas.openxmlformats.org/officeDocument/2006/relationships" xmlns:p="http://schemas.openxmlformats.org/presentationml/2006/main">
         <p:nvGraphicFramePr>
-          <p:cNvPr id="183025567" name=""/>
+          <p:cNvPr id="574188300" name=""/>
           <p:cNvGraphicFramePr>
             <a:graphicFrameLocks noGrp="true"/>
           </p:cNvGraphicFramePr>

--- a/template-pptx.pptx
+++ b/template-pptx.pptx
@@ -5823,7 +5823,7 @@
       </p:sp>
       <p:graphicFrame xmlns:a="http://schemas.openxmlformats.org/drawingml/2006/main" xmlns:r="http://schemas.openxmlformats.org/officeDocument/2006/relationships" xmlns:p="http://schemas.openxmlformats.org/presentationml/2006/main">
         <p:nvGraphicFramePr>
-          <p:cNvPr id="574188300" name=""/>
+          <p:cNvPr id="297817570" name=""/>
           <p:cNvGraphicFramePr>
             <a:graphicFrameLocks noGrp="true"/>
           </p:cNvGraphicFramePr>

--- a/template-pptx.pptx
+++ b/template-pptx.pptx
@@ -5823,7 +5823,7 @@
       </p:sp>
       <p:graphicFrame xmlns:a="http://schemas.openxmlformats.org/drawingml/2006/main" xmlns:r="http://schemas.openxmlformats.org/officeDocument/2006/relationships" xmlns:p="http://schemas.openxmlformats.org/presentationml/2006/main">
         <p:nvGraphicFramePr>
-          <p:cNvPr id="297817570" name=""/>
+          <p:cNvPr id="590736323" name=""/>
           <p:cNvGraphicFramePr>
             <a:graphicFrameLocks noGrp="true"/>
           </p:cNvGraphicFramePr>

--- a/template-pptx.pptx
+++ b/template-pptx.pptx
@@ -5823,7 +5823,7 @@
       </p:sp>
       <p:graphicFrame xmlns:a="http://schemas.openxmlformats.org/drawingml/2006/main" xmlns:r="http://schemas.openxmlformats.org/officeDocument/2006/relationships" xmlns:p="http://schemas.openxmlformats.org/presentationml/2006/main">
         <p:nvGraphicFramePr>
-          <p:cNvPr id="590736323" name=""/>
+          <p:cNvPr id="224975225" name=""/>
           <p:cNvGraphicFramePr>
             <a:graphicFrameLocks noGrp="true"/>
           </p:cNvGraphicFramePr>

--- a/template-pptx.pptx
+++ b/template-pptx.pptx
@@ -5823,7 +5823,7 @@
       </p:sp>
       <p:graphicFrame xmlns:a="http://schemas.openxmlformats.org/drawingml/2006/main" xmlns:r="http://schemas.openxmlformats.org/officeDocument/2006/relationships" xmlns:p="http://schemas.openxmlformats.org/presentationml/2006/main">
         <p:nvGraphicFramePr>
-          <p:cNvPr id="224975225" name=""/>
+          <p:cNvPr id="214166612" name=""/>
           <p:cNvGraphicFramePr>
             <a:graphicFrameLocks noGrp="true"/>
           </p:cNvGraphicFramePr>

--- a/template-pptx.pptx
+++ b/template-pptx.pptx
@@ -5823,7 +5823,7 @@
       </p:sp>
       <p:graphicFrame xmlns:a="http://schemas.openxmlformats.org/drawingml/2006/main" xmlns:r="http://schemas.openxmlformats.org/officeDocument/2006/relationships" xmlns:p="http://schemas.openxmlformats.org/presentationml/2006/main">
         <p:nvGraphicFramePr>
-          <p:cNvPr id="214166612" name=""/>
+          <p:cNvPr id="679125323" name=""/>
           <p:cNvGraphicFramePr>
             <a:graphicFrameLocks noGrp="true"/>
           </p:cNvGraphicFramePr>

--- a/template-pptx.pptx
+++ b/template-pptx.pptx
@@ -5823,7 +5823,7 @@
       </p:sp>
       <p:graphicFrame xmlns:a="http://schemas.openxmlformats.org/drawingml/2006/main" xmlns:r="http://schemas.openxmlformats.org/officeDocument/2006/relationships" xmlns:p="http://schemas.openxmlformats.org/presentationml/2006/main">
         <p:nvGraphicFramePr>
-          <p:cNvPr id="679125323" name=""/>
+          <p:cNvPr id="835191069" name=""/>
           <p:cNvGraphicFramePr>
             <a:graphicFrameLocks noGrp="true"/>
           </p:cNvGraphicFramePr>

--- a/template-pptx.pptx
+++ b/template-pptx.pptx
@@ -5823,7 +5823,7 @@
       </p:sp>
       <p:graphicFrame xmlns:a="http://schemas.openxmlformats.org/drawingml/2006/main" xmlns:r="http://schemas.openxmlformats.org/officeDocument/2006/relationships" xmlns:p="http://schemas.openxmlformats.org/presentationml/2006/main">
         <p:nvGraphicFramePr>
-          <p:cNvPr id="835191069" name=""/>
+          <p:cNvPr id="1666696" name=""/>
           <p:cNvGraphicFramePr>
             <a:graphicFrameLocks noGrp="true"/>
           </p:cNvGraphicFramePr>

--- a/template-pptx.pptx
+++ b/template-pptx.pptx
@@ -5823,7 +5823,7 @@
       </p:sp>
       <p:graphicFrame xmlns:a="http://schemas.openxmlformats.org/drawingml/2006/main" xmlns:r="http://schemas.openxmlformats.org/officeDocument/2006/relationships" xmlns:p="http://schemas.openxmlformats.org/presentationml/2006/main">
         <p:nvGraphicFramePr>
-          <p:cNvPr id="1666696" name=""/>
+          <p:cNvPr id="160702976" name=""/>
           <p:cNvGraphicFramePr>
             <a:graphicFrameLocks noGrp="true"/>
           </p:cNvGraphicFramePr>

--- a/template-pptx.pptx
+++ b/template-pptx.pptx
@@ -5823,7 +5823,7 @@
       </p:sp>
       <p:graphicFrame xmlns:a="http://schemas.openxmlformats.org/drawingml/2006/main" xmlns:r="http://schemas.openxmlformats.org/officeDocument/2006/relationships" xmlns:p="http://schemas.openxmlformats.org/presentationml/2006/main">
         <p:nvGraphicFramePr>
-          <p:cNvPr id="160702976" name=""/>
+          <p:cNvPr id="779324553" name=""/>
           <p:cNvGraphicFramePr>
             <a:graphicFrameLocks noGrp="true"/>
           </p:cNvGraphicFramePr>

--- a/template-pptx.pptx
+++ b/template-pptx.pptx
@@ -195,8 +195,8 @@
         </p:blipFill>
         <p:spPr>
           <a:xfrm>
-            <a:off x="1422659" y="5807075"/>
-            <a:ext cx="9346681" cy="784225"/>
+            <a:off x="1422659" y="6004465"/>
+            <a:ext cx="9346681" cy="389445"/>
           </a:xfrm>
           <a:prstGeom prst="rect">
             <a:avLst/>
@@ -5823,7 +5823,7 @@
       </p:sp>
       <p:graphicFrame xmlns:a="http://schemas.openxmlformats.org/drawingml/2006/main" xmlns:r="http://schemas.openxmlformats.org/officeDocument/2006/relationships" xmlns:p="http://schemas.openxmlformats.org/presentationml/2006/main">
         <p:nvGraphicFramePr>
-          <p:cNvPr id="779324553" name=""/>
+          <p:cNvPr id="195674492" name=""/>
           <p:cNvGraphicFramePr>
             <a:graphicFrameLocks noGrp="true"/>
           </p:cNvGraphicFramePr>

--- a/template-pptx.pptx
+++ b/template-pptx.pptx
@@ -5823,7 +5823,7 @@
       </p:sp>
       <p:graphicFrame xmlns:a="http://schemas.openxmlformats.org/drawingml/2006/main" xmlns:r="http://schemas.openxmlformats.org/officeDocument/2006/relationships" xmlns:p="http://schemas.openxmlformats.org/presentationml/2006/main">
         <p:nvGraphicFramePr>
-          <p:cNvPr id="195674492" name=""/>
+          <p:cNvPr id="113906257" name=""/>
           <p:cNvGraphicFramePr>
             <a:graphicFrameLocks noGrp="true"/>
           </p:cNvGraphicFramePr>

--- a/template-pptx.pptx
+++ b/template-pptx.pptx
@@ -5823,7 +5823,7 @@
       </p:sp>
       <p:graphicFrame xmlns:a="http://schemas.openxmlformats.org/drawingml/2006/main" xmlns:r="http://schemas.openxmlformats.org/officeDocument/2006/relationships" xmlns:p="http://schemas.openxmlformats.org/presentationml/2006/main">
         <p:nvGraphicFramePr>
-          <p:cNvPr id="113906257" name=""/>
+          <p:cNvPr id="202911288" name=""/>
           <p:cNvGraphicFramePr>
             <a:graphicFrameLocks noGrp="true"/>
           </p:cNvGraphicFramePr>

--- a/template-pptx.pptx
+++ b/template-pptx.pptx
@@ -5823,7 +5823,7 @@
       </p:sp>
       <p:graphicFrame xmlns:a="http://schemas.openxmlformats.org/drawingml/2006/main" xmlns:r="http://schemas.openxmlformats.org/officeDocument/2006/relationships" xmlns:p="http://schemas.openxmlformats.org/presentationml/2006/main">
         <p:nvGraphicFramePr>
-          <p:cNvPr id="202911288" name=""/>
+          <p:cNvPr id="610188778" name=""/>
           <p:cNvGraphicFramePr>
             <a:graphicFrameLocks noGrp="true"/>
           </p:cNvGraphicFramePr>

--- a/template-pptx.pptx
+++ b/template-pptx.pptx
@@ -5823,7 +5823,7 @@
       </p:sp>
       <p:graphicFrame xmlns:a="http://schemas.openxmlformats.org/drawingml/2006/main" xmlns:r="http://schemas.openxmlformats.org/officeDocument/2006/relationships" xmlns:p="http://schemas.openxmlformats.org/presentationml/2006/main">
         <p:nvGraphicFramePr>
-          <p:cNvPr id="610188778" name=""/>
+          <p:cNvPr id="834635264" name=""/>
           <p:cNvGraphicFramePr>
             <a:graphicFrameLocks noGrp="true"/>
           </p:cNvGraphicFramePr>

--- a/template-pptx.pptx
+++ b/template-pptx.pptx
@@ -5823,7 +5823,7 @@
       </p:sp>
       <p:graphicFrame xmlns:a="http://schemas.openxmlformats.org/drawingml/2006/main" xmlns:r="http://schemas.openxmlformats.org/officeDocument/2006/relationships" xmlns:p="http://schemas.openxmlformats.org/presentationml/2006/main">
         <p:nvGraphicFramePr>
-          <p:cNvPr id="834635264" name=""/>
+          <p:cNvPr id="99742201" name=""/>
           <p:cNvGraphicFramePr>
             <a:graphicFrameLocks noGrp="true"/>
           </p:cNvGraphicFramePr>
@@ -5846,7 +5846,7 @@
                 <a:gridCol w="562070"/>
                 <a:gridCol w="1261593"/>
               </a:tblGrid>
-              <a:tr h="392765">
+              <a:tr h="395605">
                 <a:tc>
                   <a:txBody>
                     <a:bodyPr/>
@@ -6359,7 +6359,7 @@
                   </a:tcPr>
                 </a:tc>
               </a:tr>
-              <a:tr h="391674">
+              <a:tr h="395605">
                 <a:tc>
                   <a:txBody>
                     <a:bodyPr/>
@@ -6872,7 +6872,7 @@
                   </a:tcPr>
                 </a:tc>
               </a:tr>
-              <a:tr h="391674">
+              <a:tr h="395605">
                 <a:tc>
                   <a:txBody>
                     <a:bodyPr/>
@@ -7385,7 +7385,7 @@
                   </a:tcPr>
                 </a:tc>
               </a:tr>
-              <a:tr h="391674">
+              <a:tr h="395605">
                 <a:tc>
                   <a:txBody>
                     <a:bodyPr/>
@@ -7898,7 +7898,7 @@
                   </a:tcPr>
                 </a:tc>
               </a:tr>
-              <a:tr h="391674">
+              <a:tr h="395605">
                 <a:tc>
                   <a:txBody>
                     <a:bodyPr/>
@@ -8411,7 +8411,7 @@
                   </a:tcPr>
                 </a:tc>
               </a:tr>
-              <a:tr h="391674">
+              <a:tr h="395605">
                 <a:tc>
                   <a:txBody>
                     <a:bodyPr/>
@@ -8946,7 +8946,7 @@
                   </a:tcPr>
                 </a:tc>
               </a:tr>
-              <a:tr h="391674">
+              <a:tr h="395605">
                 <a:tc>
                   <a:txBody>
                     <a:bodyPr/>

--- a/template-pptx.pptx
+++ b/template-pptx.pptx
@@ -5823,7 +5823,7 @@
       </p:sp>
       <p:graphicFrame xmlns:a="http://schemas.openxmlformats.org/drawingml/2006/main" xmlns:r="http://schemas.openxmlformats.org/officeDocument/2006/relationships" xmlns:p="http://schemas.openxmlformats.org/presentationml/2006/main">
         <p:nvGraphicFramePr>
-          <p:cNvPr id="99742201" name=""/>
+          <p:cNvPr id="559377672" name=""/>
           <p:cNvGraphicFramePr>
             <a:graphicFrameLocks noGrp="true"/>
           </p:cNvGraphicFramePr>

--- a/template-pptx.pptx
+++ b/template-pptx.pptx
@@ -5082,7 +5082,7 @@
             </a:pPr>
             <a:r>
               <a:rPr/>
-              <a:t>This Quarto extension allows you to create your slides using a theme that follows AAGI typography and colour styles and provides the official AAGI logo and cover image for the title slide.</a:t>
+              <a:t>This Quarto extension allows you to create slides using an AAGI-styled theme.</a:t>
             </a:r>
           </a:p>
         </p:txBody>
@@ -5624,17 +5624,7 @@
             </a:pPr>
             <a:r>
               <a:rPr/>
-              <a:t>For tables, we suggest pairing with the R package </a:t>
-            </a:r>
-            <a:r>
-              <a:rPr>
-                <a:hlinkClick r:id="rId2"/>
-              </a:rPr>
-              <a:t>{AAGIThemes}</a:t>
-            </a:r>
-            <a:r>
-              <a:rPr/>
-              <a:t> to provide AAGI themed tables using </a:t>
+              <a:t>For tables, we suggest using {AAGIThemes} with </a:t>
             </a:r>
             <a:r>
               <a:rPr>
@@ -5644,7 +5634,7 @@
             </a:r>
             <a:r>
               <a:rPr/>
-              <a:t>, which offers more flexibility in formatting.</a:t>
+              <a:t>.</a:t>
             </a:r>
           </a:p>
         </p:txBody>
@@ -5823,7 +5813,7 @@
       </p:sp>
       <p:graphicFrame xmlns:a="http://schemas.openxmlformats.org/drawingml/2006/main" xmlns:r="http://schemas.openxmlformats.org/officeDocument/2006/relationships" xmlns:p="http://schemas.openxmlformats.org/presentationml/2006/main">
         <p:nvGraphicFramePr>
-          <p:cNvPr id="559377672" name=""/>
+          <p:cNvPr id="377915586" name=""/>
           <p:cNvGraphicFramePr>
             <a:graphicFrameLocks noGrp="true"/>
           </p:cNvGraphicFramePr>
@@ -9620,7 +9610,7 @@
           <p:cNvPr id="2" name="Title 1">
             <a:extLst>
               <a:ext uri="{FF2B5EF4-FFF2-40B4-BE49-F238E27FC236}">
-                <a16:creationId xmlns:a16="http://schemas.microsoft.com/office/drawing/2014/main" id="{9C413029-C271-5AE7-0D1F-287E7C844BD3}"/>
+                <a16:creationId xmlns:a16="http://schemas.microsoft.com/office/drawing/2014/main" id="{FEB7501B-E29E-9380-EF6F-54697E247B0D}"/>
               </a:ext>
             </a:extLst>
           </p:cNvPr>
@@ -9631,12 +9621,7 @@
             <p:ph type="title"/>
           </p:nvPr>
         </p:nvSpPr>
-        <p:spPr>
-          <a:xfrm>
-            <a:off x="106362" y="327805"/>
-            <a:ext cx="3932237" cy="1155640"/>
-          </a:xfrm>
-        </p:spPr>
+        <p:spPr/>
         <p:txBody>
           <a:bodyPr/>
           <a:lstStyle/>
@@ -9647,43 +9632,6 @@
             <a:r>
               <a:rPr/>
               <a:t>Basic Figures</a:t>
-            </a:r>
-          </a:p>
-        </p:txBody>
-      </p:sp>
-      <p:sp>
-        <p:nvSpPr>
-          <p:cNvPr id="4" name="Text Placeholder 3">
-            <a:extLst>
-              <a:ext uri="{FF2B5EF4-FFF2-40B4-BE49-F238E27FC236}">
-                <a16:creationId xmlns:a16="http://schemas.microsoft.com/office/drawing/2014/main" id="{BCAB13E2-558B-73CD-7C43-3E1E9009581D}"/>
-              </a:ext>
-            </a:extLst>
-          </p:cNvPr>
-          <p:cNvSpPr>
-            <a:spLocks noGrp="1"/>
-          </p:cNvSpPr>
-          <p:nvPr>
-            <p:ph idx="2" sz="half" type="body"/>
-          </p:nvPr>
-        </p:nvSpPr>
-        <p:spPr/>
-        <p:txBody>
-          <a:bodyPr/>
-          <a:lstStyle/>
-          <a:p>
-            <a:pPr lvl="0" indent="0" marL="0">
-              <a:buNone/>
-            </a:pPr>
-            <a:r>
-              <a:rPr>
-                <a:hlinkClick r:id="rId2"/>
-              </a:rPr>
-              <a:t>{AAGIThemes}</a:t>
-            </a:r>
-            <a:r>
-              <a:rPr/>
-              <a:t> also provides support for theming basic figures in R.</a:t>
             </a:r>
           </a:p>
         </p:txBody>
@@ -9697,15 +9645,15 @@
           <p:nvPr/>
         </p:nvPicPr>
         <p:blipFill>
-          <a:blip r:embed="rId3"/>
+          <a:blip r:embed="rId2"/>
           <a:stretch>
             <a:fillRect/>
           </a:stretch>
         </p:blipFill>
         <p:spPr bwMode="auto">
           <a:xfrm>
-            <a:off x="4406900" y="1231900"/>
-            <a:ext cx="7391400" cy="5283200"/>
+            <a:off x="2628900" y="1117600"/>
+            <a:ext cx="6896100" cy="4927600"/>
           </a:xfrm>
           <a:prstGeom prst="rect">
             <a:avLst/>
@@ -9720,10 +9668,10 @@
       </p:pic>
       <p:sp>
         <p:nvSpPr>
-          <p:cNvPr id="10" name="Date Placeholder 3">
+          <p:cNvPr id="11" name="Date Placeholder 3">
             <a:extLst>
               <a:ext uri="{FF2B5EF4-FFF2-40B4-BE49-F238E27FC236}">
-                <a16:creationId xmlns:a16="http://schemas.microsoft.com/office/drawing/2014/main" id="{DB1ACC7A-07B3-6AD6-5E37-BC8E83FDD804}"/>
+                <a16:creationId xmlns:a16="http://schemas.microsoft.com/office/drawing/2014/main" id="{2282C182-213E-857B-91CD-C9E61BC5B253}"/>
               </a:ext>
             </a:extLst>
           </p:cNvPr>
@@ -9758,10 +9706,10 @@
       </p:sp>
       <p:sp>
         <p:nvSpPr>
-          <p:cNvPr id="11" name="Footer Placeholder 4">
+          <p:cNvPr id="12" name="Footer Placeholder 4">
             <a:extLst>
               <a:ext uri="{FF2B5EF4-FFF2-40B4-BE49-F238E27FC236}">
-                <a16:creationId xmlns:a16="http://schemas.microsoft.com/office/drawing/2014/main" id="{F4D392CE-18BA-0471-C88E-4B58D94E910E}"/>
+                <a16:creationId xmlns:a16="http://schemas.microsoft.com/office/drawing/2014/main" id="{3F839BB0-7B6B-E5D8-1C7E-7A9ACEB6EC47}"/>
               </a:ext>
             </a:extLst>
           </p:cNvPr>
@@ -9796,10 +9744,10 @@
       </p:sp>
       <p:sp>
         <p:nvSpPr>
-          <p:cNvPr id="12" name="Slide Number Placeholder 5">
+          <p:cNvPr id="13" name="Slide Number Placeholder 5">
             <a:extLst>
               <a:ext uri="{FF2B5EF4-FFF2-40B4-BE49-F238E27FC236}">
-                <a16:creationId xmlns:a16="http://schemas.microsoft.com/office/drawing/2014/main" id="{F93E06BB-0E85-3A0C-3DE7-8EE1637120F4}"/>
+                <a16:creationId xmlns:a16="http://schemas.microsoft.com/office/drawing/2014/main" id="{D9D80738-ACDC-3B67-1ED3-1B320F625400}"/>
               </a:ext>
             </a:extLst>
           </p:cNvPr>
@@ -9864,7 +9812,7 @@
           <p:cNvPr id="2" name="Title 1">
             <a:extLst>
               <a:ext uri="{FF2B5EF4-FFF2-40B4-BE49-F238E27FC236}">
-                <a16:creationId xmlns:a16="http://schemas.microsoft.com/office/drawing/2014/main" id="{9C413029-C271-5AE7-0D1F-287E7C844BD3}"/>
+                <a16:creationId xmlns:a16="http://schemas.microsoft.com/office/drawing/2014/main" id="{FEB7501B-E29E-9380-EF6F-54697E247B0D}"/>
               </a:ext>
             </a:extLst>
           </p:cNvPr>
@@ -9875,12 +9823,7 @@
             <p:ph type="title"/>
           </p:nvPr>
         </p:nvSpPr>
-        <p:spPr>
-          <a:xfrm>
-            <a:off x="106362" y="327805"/>
-            <a:ext cx="3932237" cy="1155640"/>
-          </a:xfrm>
-        </p:spPr>
+        <p:spPr/>
         <p:txBody>
           <a:bodyPr/>
           <a:lstStyle/>
@@ -9891,53 +9834,6 @@
             <a:r>
               <a:rPr/>
               <a:t>Figures with {ggplot2}</a:t>
-            </a:r>
-          </a:p>
-        </p:txBody>
-      </p:sp>
-      <p:sp>
-        <p:nvSpPr>
-          <p:cNvPr id="4" name="Text Placeholder 3">
-            <a:extLst>
-              <a:ext uri="{FF2B5EF4-FFF2-40B4-BE49-F238E27FC236}">
-                <a16:creationId xmlns:a16="http://schemas.microsoft.com/office/drawing/2014/main" id="{BCAB13E2-558B-73CD-7C43-3E1E9009581D}"/>
-              </a:ext>
-            </a:extLst>
-          </p:cNvPr>
-          <p:cNvSpPr>
-            <a:spLocks noGrp="1"/>
-          </p:cNvSpPr>
-          <p:nvPr>
-            <p:ph idx="2" sz="half" type="body"/>
-          </p:nvPr>
-        </p:nvSpPr>
-        <p:spPr/>
-        <p:txBody>
-          <a:bodyPr/>
-          <a:lstStyle/>
-          <a:p>
-            <a:pPr lvl="0" indent="0" marL="0">
-              <a:buNone/>
-            </a:pPr>
-            <a:r>
-              <a:rPr>
-                <a:hlinkClick r:id="rId2"/>
-              </a:rPr>
-              <a:t>{AAGIThemes}</a:t>
-            </a:r>
-            <a:r>
-              <a:rPr/>
-              <a:t> also provides support for theming </a:t>
-            </a:r>
-            <a:r>
-              <a:rPr>
-                <a:hlinkClick r:id="rId3"/>
-              </a:rPr>
-              <a:t>{ggplot2}</a:t>
-            </a:r>
-            <a:r>
-              <a:rPr/>
-              <a:t> outputs in R.</a:t>
             </a:r>
           </a:p>
         </p:txBody>
@@ -9951,15 +9847,15 @@
           <p:nvPr/>
         </p:nvPicPr>
         <p:blipFill>
-          <a:blip r:embed="rId4"/>
+          <a:blip r:embed="rId2"/>
           <a:stretch>
             <a:fillRect/>
           </a:stretch>
         </p:blipFill>
         <p:spPr bwMode="auto">
           <a:xfrm>
-            <a:off x="4406900" y="1231900"/>
-            <a:ext cx="7391400" cy="5283200"/>
+            <a:off x="2628900" y="1117600"/>
+            <a:ext cx="6896100" cy="4927600"/>
           </a:xfrm>
           <a:prstGeom prst="rect">
             <a:avLst/>
@@ -9974,10 +9870,10 @@
       </p:pic>
       <p:sp>
         <p:nvSpPr>
-          <p:cNvPr id="10" name="Date Placeholder 3">
+          <p:cNvPr id="11" name="Date Placeholder 3">
             <a:extLst>
               <a:ext uri="{FF2B5EF4-FFF2-40B4-BE49-F238E27FC236}">
-                <a16:creationId xmlns:a16="http://schemas.microsoft.com/office/drawing/2014/main" id="{DB1ACC7A-07B3-6AD6-5E37-BC8E83FDD804}"/>
+                <a16:creationId xmlns:a16="http://schemas.microsoft.com/office/drawing/2014/main" id="{2282C182-213E-857B-91CD-C9E61BC5B253}"/>
               </a:ext>
             </a:extLst>
           </p:cNvPr>
@@ -10012,10 +9908,10 @@
       </p:sp>
       <p:sp>
         <p:nvSpPr>
-          <p:cNvPr id="11" name="Footer Placeholder 4">
+          <p:cNvPr id="12" name="Footer Placeholder 4">
             <a:extLst>
               <a:ext uri="{FF2B5EF4-FFF2-40B4-BE49-F238E27FC236}">
-                <a16:creationId xmlns:a16="http://schemas.microsoft.com/office/drawing/2014/main" id="{F4D392CE-18BA-0471-C88E-4B58D94E910E}"/>
+                <a16:creationId xmlns:a16="http://schemas.microsoft.com/office/drawing/2014/main" id="{3F839BB0-7B6B-E5D8-1C7E-7A9ACEB6EC47}"/>
               </a:ext>
             </a:extLst>
           </p:cNvPr>
@@ -10050,10 +9946,10 @@
       </p:sp>
       <p:sp>
         <p:nvSpPr>
-          <p:cNvPr id="12" name="Slide Number Placeholder 5">
+          <p:cNvPr id="13" name="Slide Number Placeholder 5">
             <a:extLst>
               <a:ext uri="{FF2B5EF4-FFF2-40B4-BE49-F238E27FC236}">
-                <a16:creationId xmlns:a16="http://schemas.microsoft.com/office/drawing/2014/main" id="{F93E06BB-0E85-3A0C-3DE7-8EE1637120F4}"/>
+                <a16:creationId xmlns:a16="http://schemas.microsoft.com/office/drawing/2014/main" id="{D9D80738-ACDC-3B67-1ED3-1B320F625400}"/>
               </a:ext>
             </a:extLst>
           </p:cNvPr>

--- a/template-pptx.pptx
+++ b/template-pptx.pptx
@@ -5813,7 +5813,7 @@
       </p:sp>
       <p:graphicFrame xmlns:a="http://schemas.openxmlformats.org/drawingml/2006/main" xmlns:r="http://schemas.openxmlformats.org/officeDocument/2006/relationships" xmlns:p="http://schemas.openxmlformats.org/presentationml/2006/main">
         <p:nvGraphicFramePr>
-          <p:cNvPr id="377915586" name=""/>
+          <p:cNvPr id="121234147" name=""/>
           <p:cNvGraphicFramePr>
             <a:graphicFrameLocks noGrp="true"/>
           </p:cNvGraphicFramePr>

--- a/template-pptx.pptx
+++ b/template-pptx.pptx
@@ -5813,7 +5813,7 @@
       </p:sp>
       <p:graphicFrame xmlns:a="http://schemas.openxmlformats.org/drawingml/2006/main" xmlns:r="http://schemas.openxmlformats.org/officeDocument/2006/relationships" xmlns:p="http://schemas.openxmlformats.org/presentationml/2006/main">
         <p:nvGraphicFramePr>
-          <p:cNvPr id="121234147" name=""/>
+          <p:cNvPr id="679941731" name=""/>
           <p:cNvGraphicFramePr>
             <a:graphicFrameLocks noGrp="true"/>
           </p:cNvGraphicFramePr>

--- a/template-pptx.pptx
+++ b/template-pptx.pptx
@@ -5813,7 +5813,7 @@
       </p:sp>
       <p:graphicFrame xmlns:a="http://schemas.openxmlformats.org/drawingml/2006/main" xmlns:r="http://schemas.openxmlformats.org/officeDocument/2006/relationships" xmlns:p="http://schemas.openxmlformats.org/presentationml/2006/main">
         <p:nvGraphicFramePr>
-          <p:cNvPr id="679941731" name=""/>
+          <p:cNvPr id="759486735" name=""/>
           <p:cNvGraphicFramePr>
             <a:graphicFrameLocks noGrp="true"/>
           </p:cNvGraphicFramePr>

--- a/template-pptx.pptx
+++ b/template-pptx.pptx
@@ -5813,7 +5813,7 @@
       </p:sp>
       <p:graphicFrame xmlns:a="http://schemas.openxmlformats.org/drawingml/2006/main" xmlns:r="http://schemas.openxmlformats.org/officeDocument/2006/relationships" xmlns:p="http://schemas.openxmlformats.org/presentationml/2006/main">
         <p:nvGraphicFramePr>
-          <p:cNvPr id="759486735" name=""/>
+          <p:cNvPr id="540192849" name=""/>
           <p:cNvGraphicFramePr>
             <a:graphicFrameLocks noGrp="true"/>
           </p:cNvGraphicFramePr>

--- a/template-pptx.pptx
+++ b/template-pptx.pptx
@@ -5813,7 +5813,7 @@
       </p:sp>
       <p:graphicFrame xmlns:a="http://schemas.openxmlformats.org/drawingml/2006/main" xmlns:r="http://schemas.openxmlformats.org/officeDocument/2006/relationships" xmlns:p="http://schemas.openxmlformats.org/presentationml/2006/main">
         <p:nvGraphicFramePr>
-          <p:cNvPr id="540192849" name=""/>
+          <p:cNvPr id="424539868" name=""/>
           <p:cNvGraphicFramePr>
             <a:graphicFrameLocks noGrp="true"/>
           </p:cNvGraphicFramePr>

--- a/template-pptx.pptx
+++ b/template-pptx.pptx
@@ -5813,7 +5813,7 @@
       </p:sp>
       <p:graphicFrame xmlns:a="http://schemas.openxmlformats.org/drawingml/2006/main" xmlns:r="http://schemas.openxmlformats.org/officeDocument/2006/relationships" xmlns:p="http://schemas.openxmlformats.org/presentationml/2006/main">
         <p:nvGraphicFramePr>
-          <p:cNvPr id="424539868" name=""/>
+          <p:cNvPr id="326283109" name=""/>
           <p:cNvGraphicFramePr>
             <a:graphicFrameLocks noGrp="true"/>
           </p:cNvGraphicFramePr>

--- a/template-pptx.pptx
+++ b/template-pptx.pptx
@@ -5813,7 +5813,7 @@
       </p:sp>
       <p:graphicFrame xmlns:a="http://schemas.openxmlformats.org/drawingml/2006/main" xmlns:r="http://schemas.openxmlformats.org/officeDocument/2006/relationships" xmlns:p="http://schemas.openxmlformats.org/presentationml/2006/main">
         <p:nvGraphicFramePr>
-          <p:cNvPr id="326283109" name=""/>
+          <p:cNvPr id="658604071" name=""/>
           <p:cNvGraphicFramePr>
             <a:graphicFrameLocks noGrp="true"/>
           </p:cNvGraphicFramePr>

--- a/template-pptx.pptx
+++ b/template-pptx.pptx
@@ -5813,7 +5813,7 @@
       </p:sp>
       <p:graphicFrame xmlns:a="http://schemas.openxmlformats.org/drawingml/2006/main" xmlns:r="http://schemas.openxmlformats.org/officeDocument/2006/relationships" xmlns:p="http://schemas.openxmlformats.org/presentationml/2006/main">
         <p:nvGraphicFramePr>
-          <p:cNvPr id="658604071" name=""/>
+          <p:cNvPr id="764745554" name=""/>
           <p:cNvGraphicFramePr>
             <a:graphicFrameLocks noGrp="true"/>
           </p:cNvGraphicFramePr>
